--- a/B2B_Sales_Agent_Townhall.pptx
+++ b/B2B_Sales_Agent_Townhall.pptx
@@ -121,6 +121,58 @@
     </p:ext>
   </p:extLst>
 </p:presentation>
+</file>
+
+<file path=ppt/revisionInfo.xml><?xml version="1.0" encoding="utf-8"?>
+<p1510:revInfo xmlns:a="http://schemas.openxmlformats.org/drawingml/2006/main" xmlns:r="http://schemas.openxmlformats.org/officeDocument/2006/relationships" xmlns:p1510="http://schemas.microsoft.com/office/powerpoint/2015/10/main">
+  <p1510:revLst>
+    <p1510:client id="{17FE41F7-F4FD-4C3D-89B5-28A08049CC66}" v="8" dt="2026-05-23T22:56:51.438"/>
+  </p1510:revLst>
+</p1510:revInfo>
+</file>
+
+<file path=ppt/changesInfos/changesInfo1.xml><?xml version="1.0" encoding="utf-8"?>
+<pc:chgInfo xmlns:a="http://schemas.openxmlformats.org/drawingml/2006/main" xmlns:r="http://schemas.openxmlformats.org/officeDocument/2006/relationships" xmlns:ac="http://schemas.microsoft.com/office/drawing/2013/main/command" xmlns:pc="http://schemas.microsoft.com/office/powerpoint/2013/main/command">
+  <pc:docChgLst>
+    <pc:chgData name="Mohan, Arun" userId="3cf97d7c-9072-4788-8fc7-36a73324abe6" providerId="ADAL" clId="{52652E29-AB0D-4F64-B689-2D843D2D16B6}"/>
+    <pc:docChg chg="modSld">
+      <pc:chgData name="Mohan, Arun" userId="3cf97d7c-9072-4788-8fc7-36a73324abe6" providerId="ADAL" clId="{52652E29-AB0D-4F64-B689-2D843D2D16B6}" dt="2026-05-23T22:56:51.438" v="7" actId="1076"/>
+      <pc:docMkLst>
+        <pc:docMk/>
+      </pc:docMkLst>
+      <pc:sldChg chg="addSp modSp">
+        <pc:chgData name="Mohan, Arun" userId="3cf97d7c-9072-4788-8fc7-36a73324abe6" providerId="ADAL" clId="{52652E29-AB0D-4F64-B689-2D843D2D16B6}" dt="2026-05-23T22:56:09.373" v="2" actId="1076"/>
+        <pc:sldMkLst>
+          <pc:docMk/>
+          <pc:sldMk cId="0" sldId="256"/>
+        </pc:sldMkLst>
+        <pc:picChg chg="add mod">
+          <ac:chgData name="Mohan, Arun" userId="3cf97d7c-9072-4788-8fc7-36a73324abe6" providerId="ADAL" clId="{52652E29-AB0D-4F64-B689-2D843D2D16B6}" dt="2026-05-23T22:56:09.373" v="2" actId="1076"/>
+          <ac:picMkLst>
+            <pc:docMk/>
+            <pc:sldMk cId="0" sldId="256"/>
+            <ac:picMk id="1026" creationId="{32AA2ACA-97BC-60F0-3834-BBB801C8E9C4}"/>
+          </ac:picMkLst>
+        </pc:picChg>
+      </pc:sldChg>
+      <pc:sldChg chg="addSp modSp">
+        <pc:chgData name="Mohan, Arun" userId="3cf97d7c-9072-4788-8fc7-36a73324abe6" providerId="ADAL" clId="{52652E29-AB0D-4F64-B689-2D843D2D16B6}" dt="2026-05-23T22:56:51.438" v="7" actId="1076"/>
+        <pc:sldMkLst>
+          <pc:docMk/>
+          <pc:sldMk cId="0" sldId="267"/>
+        </pc:sldMkLst>
+        <pc:picChg chg="add mod">
+          <ac:chgData name="Mohan, Arun" userId="3cf97d7c-9072-4788-8fc7-36a73324abe6" providerId="ADAL" clId="{52652E29-AB0D-4F64-B689-2D843D2D16B6}" dt="2026-05-23T22:56:51.438" v="7" actId="1076"/>
+          <ac:picMkLst>
+            <pc:docMk/>
+            <pc:sldMk cId="0" sldId="267"/>
+            <ac:picMk id="2050" creationId="{C3C6DEA2-1606-5D4A-4145-F8EB11DC2AE3}"/>
+          </ac:picMkLst>
+        </pc:picChg>
+      </pc:sldChg>
+    </pc:docChg>
+  </pc:docChgLst>
+</pc:chgInfo>
 </file>
 
 <file path=ppt/notesMasters/notesMaster1.xml><?xml version="1.0" encoding="utf-8"?>
@@ -2320,6 +2372,53 @@
           </a:p>
         </p:txBody>
       </p:sp>
+      <p:pic>
+        <p:nvPicPr>
+          <p:cNvPr id="1026" name="Picture 2">
+            <a:extLst>
+              <a:ext uri="{FF2B5EF4-FFF2-40B4-BE49-F238E27FC236}">
+                <a16:creationId xmlns:a16="http://schemas.microsoft.com/office/drawing/2014/main" id="{32AA2ACA-97BC-60F0-3834-BBB801C8E9C4}"/>
+              </a:ext>
+            </a:extLst>
+          </p:cNvPr>
+          <p:cNvPicPr>
+            <a:picLocks noChangeAspect="1" noChangeArrowheads="1"/>
+          </p:cNvPicPr>
+          <p:nvPr/>
+        </p:nvPicPr>
+        <p:blipFill>
+          <a:blip r:embed="rId4">
+            <a:extLst>
+              <a:ext uri="{28A0092B-C50C-407E-A947-70E740481C1C}">
+                <a14:useLocalDpi xmlns:a14="http://schemas.microsoft.com/office/drawing/2010/main" val="0"/>
+              </a:ext>
+            </a:extLst>
+          </a:blip>
+          <a:srcRect/>
+          <a:stretch>
+            <a:fillRect/>
+          </a:stretch>
+        </p:blipFill>
+        <p:spPr bwMode="auto">
+          <a:xfrm>
+            <a:off x="7269289" y="235172"/>
+            <a:ext cx="1508951" cy="1508951"/>
+          </a:xfrm>
+          <a:prstGeom prst="rect">
+            <a:avLst/>
+          </a:prstGeom>
+          <a:noFill/>
+          <a:extLst>
+            <a:ext uri="{909E8E84-426E-40DD-AFC4-6F175D3DCCD1}">
+              <a14:hiddenFill xmlns:a14="http://schemas.microsoft.com/office/drawing/2010/main">
+                <a:solidFill>
+                  <a:srgbClr val="FFFFFF"/>
+                </a:solidFill>
+              </a14:hiddenFill>
+            </a:ext>
+          </a:extLst>
+        </p:spPr>
+      </p:pic>
     </p:spTree>
   </p:cSld>
   <p:clrMapOvr>
@@ -5339,6 +5438,53 @@
           </a:p>
         </p:txBody>
       </p:sp>
+      <p:pic>
+        <p:nvPicPr>
+          <p:cNvPr id="2050" name="Picture 2">
+            <a:extLst>
+              <a:ext uri="{FF2B5EF4-FFF2-40B4-BE49-F238E27FC236}">
+                <a16:creationId xmlns:a16="http://schemas.microsoft.com/office/drawing/2014/main" id="{C3C6DEA2-1606-5D4A-4145-F8EB11DC2AE3}"/>
+              </a:ext>
+            </a:extLst>
+          </p:cNvPr>
+          <p:cNvPicPr>
+            <a:picLocks noChangeAspect="1" noChangeArrowheads="1"/>
+          </p:cNvPicPr>
+          <p:nvPr/>
+        </p:nvPicPr>
+        <p:blipFill>
+          <a:blip r:embed="rId3">
+            <a:extLst>
+              <a:ext uri="{28A0092B-C50C-407E-A947-70E740481C1C}">
+                <a14:useLocalDpi xmlns:a14="http://schemas.microsoft.com/office/drawing/2010/main" val="0"/>
+              </a:ext>
+            </a:extLst>
+          </a:blip>
+          <a:srcRect/>
+          <a:stretch>
+            <a:fillRect/>
+          </a:stretch>
+        </p:blipFill>
+        <p:spPr bwMode="auto">
+          <a:xfrm>
+            <a:off x="7316948" y="3449036"/>
+            <a:ext cx="1459543" cy="1459543"/>
+          </a:xfrm>
+          <a:prstGeom prst="rect">
+            <a:avLst/>
+          </a:prstGeom>
+          <a:noFill/>
+          <a:extLst>
+            <a:ext uri="{909E8E84-426E-40DD-AFC4-6F175D3DCCD1}">
+              <a14:hiddenFill xmlns:a14="http://schemas.microsoft.com/office/drawing/2010/main">
+                <a:solidFill>
+                  <a:srgbClr val="FFFFFF"/>
+                </a:solidFill>
+              </a14:hiddenFill>
+            </a:ext>
+          </a:extLst>
+        </p:spPr>
+      </p:pic>
     </p:spTree>
   </p:cSld>
   <p:clrMapOvr>
